--- a/assets/powerpoints/module-n3-epicerie/A2-treize-ou-trente.pptx
+++ b/assets/powerpoints/module-n3-epicerie/A2-treize-ou-trente.pptx
@@ -11436,7 +11436,43 @@
                 </a:solidFill>
                 <a:latin typeface="Verdana"/>
               </a:rPr>
-              <a:t>Le son &lt;b&gt;ze&lt;/b&gt; — celui du z de « zéro » — annonce un nombre entre 13 et 16. Le son &lt;b&gt;te&lt;/b&gt; — celui du t de « table » — annonce une dizaine : 30, 40, 50, 60. La fin est plus courte que le début, mais c'est elle qui porte toute l'information.</a:t>
+              <a:t>Le son </a:t>
+            </a:r>
+            <a:r>
+              <a:rPr sz="2000" b="1" i="0">
+                <a:solidFill>
+                  <a:srgbClr val="4B4F52"/>
+                </a:solidFill>
+                <a:latin typeface="Verdana"/>
+              </a:rPr>
+              <a:t>ze</a:t>
+            </a:r>
+            <a:r>
+              <a:rPr sz="2000" b="0" i="0">
+                <a:solidFill>
+                  <a:srgbClr val="4B4F52"/>
+                </a:solidFill>
+                <a:latin typeface="Verdana"/>
+              </a:rPr>
+              <a:t> — celui du z de « zéro » — annonce un nombre entre 13 et 16. Le son </a:t>
+            </a:r>
+            <a:r>
+              <a:rPr sz="2000" b="1" i="0">
+                <a:solidFill>
+                  <a:srgbClr val="4B4F52"/>
+                </a:solidFill>
+                <a:latin typeface="Verdana"/>
+              </a:rPr>
+              <a:t>te</a:t>
+            </a:r>
+            <a:r>
+              <a:rPr sz="2000" b="0" i="0">
+                <a:solidFill>
+                  <a:srgbClr val="4B4F52"/>
+                </a:solidFill>
+                <a:latin typeface="Verdana"/>
+              </a:rPr>
+              <a:t> — celui du t de « table » — annonce une dizaine : 30, 40, 50, 60. La fin est plus courte que le début, mais c'est elle qui porte toute l'information.</a:t>
             </a:r>
           </a:p>
         </p:txBody>
@@ -12371,7 +12407,25 @@
                 </a:solidFill>
                 <a:latin typeface="Verdana"/>
               </a:rPr>
-              <a:t>Donner les &lt;b&gt;deux&lt;/b&gt; possibilités est la façon la plus rapide de régler la question : la personne répond en un mot. Demander « vous pouvez répéter ? » fait redire la même phrase à la même vitesse — et on n'entend pas mieux la deuxième fois.</a:t>
+              <a:t>Donner les </a:t>
+            </a:r>
+            <a:r>
+              <a:rPr sz="2000" b="1" i="0">
+                <a:solidFill>
+                  <a:srgbClr val="4B4F52"/>
+                </a:solidFill>
+                <a:latin typeface="Verdana"/>
+              </a:rPr>
+              <a:t>deux</a:t>
+            </a:r>
+            <a:r>
+              <a:rPr sz="2000" b="0" i="0">
+                <a:solidFill>
+                  <a:srgbClr val="4B4F52"/>
+                </a:solidFill>
+                <a:latin typeface="Verdana"/>
+              </a:rPr>
+              <a:t> possibilités est la façon la plus rapide de régler la question : la personne répond en un mot. Demander « vous pouvez répéter ? » fait redire la même phrase à la même vitesse — et on n'entend pas mieux la deuxième fois.</a:t>
             </a:r>
           </a:p>
         </p:txBody>
